--- a/outputs/GFCC28Jun2026_13thSundayinOrdinaryTime.pptx
+++ b/outputs/GFCC28Jun2026_13thSundayinOrdinaryTime.pptx
@@ -5555,7 +5555,7 @@
                   <a:srgbClr val="F0FDF4"/>
                 </a:solidFill>
               </a:rPr>
-              <a:t>—</a:t>
+              <a:t>2 Kings 4:8-11, 14-16a</a:t>
             </a:r>
           </a:p>
         </p:txBody>
@@ -5785,7 +5785,7 @@
                 <a:latin typeface="Arial Black" panose="020B0604020202020204" pitchFamily="34" charset="0"/>
                 <a:cs typeface="Arial Black" panose="020B0604020202020204" pitchFamily="34" charset="0"/>
               </a:rPr>
-              <a:t/>
+              <a:t>FOREVER I WILL SING THE GOODNESS OF THE LORD.</a:t>
             </a:r>
           </a:p>
         </p:txBody>
@@ -6022,7 +6022,7 @@
           <a:noFill/>
         </p:spPr>
         <p:txBody>
-          <a:bodyPr wrap="square" lIns="109728" rIns="109728" tIns="73152" bIns="73152" anchor="ctr">
+          <a:bodyPr wrap="none" lIns="109728" rIns="109728" tIns="73152" bIns="73152" anchor="ctr">
             <a:noAutofit/>
           </a:bodyPr>
           <a:lstStyle/>
@@ -6109,7 +6109,7 @@
               <a:lnSpc>
                 <a:spcPct val="108000"/>
               </a:lnSpc>
-              <a:defRPr sz="3800" b="0" i="0" u="none">
+              <a:defRPr sz="3000" b="0" i="0" u="none">
                 <a:solidFill>
                   <a:srgbClr val="EFEDEC"/>
                 </a:solidFill>
@@ -6117,7 +6117,7 @@
               </a:defRPr>
             </a:pPr>
             <a:r>
-              <a:t>“He who loves father or mother more than me is not worthy of me;</a:t>
+              <a:t>“Whoever loves father or mother more than me is not worthy of me, and whoever loves son or daughter more than me is not worthy of me;</a:t>
             </a:r>
           </a:p>
           <a:p>
@@ -6125,7 +6125,7 @@
               <a:lnSpc>
                 <a:spcPct val="108000"/>
               </a:lnSpc>
-              <a:defRPr sz="3800" b="0" i="0" u="none">
+              <a:defRPr sz="3000" b="0" i="0" u="none">
                 <a:solidFill>
                   <a:srgbClr val="EFEDEC"/>
                 </a:solidFill>
@@ -6133,7 +6133,7 @@
               </a:defRPr>
             </a:pPr>
             <a:r>
-              <a:t>and he who loves son or daughter more than me isn't worthy of me.”</a:t>
+              <a:t>and whoever does not take up his cross and follow after me is not worthy of me.”</a:t>
             </a:r>
           </a:p>
         </p:txBody>
@@ -6488,79 +6488,37 @@
               <a:defRPr/>
             </a:pPr>
             <a:r>
-              <a:rPr lang="en-US" sz="6900" b="1">
+              <a:rPr sz="6900" b="1">
                 <a:solidFill>
                   <a:srgbClr val="F0FDF4"/>
                 </a:solidFill>
                 <a:latin typeface="Arial"/>
-                <a:ea typeface="Poppins Bold"/>
-                <a:cs typeface="Poppins Bold"/>
-                <a:sym typeface="Poppins Bold"/>
-              </a:rPr>
-              <a:t>ALLELUIA! ALLELUIA!</a:t>
-            </a:r>
-          </a:p>
-          <a:p>
-            <a:pPr algn="ctr">
-              <a:lnSpc>
-                <a:spcPts val="9659"/>
-              </a:lnSpc>
-              <a:defRPr/>
-            </a:pPr>
-            <a:r>
-              <a:rPr lang="en-US" sz="6900" b="1">
+              </a:rPr>
+              <a:t>Alleluia, alleluia, alleluia!</a:t>
+            </a:r>
+          </a:p>
+          <a:p>
+            <a:pPr algn="ctr"/>
+            <a:r>
+              <a:rPr sz="6900" b="1">
                 <a:solidFill>
                   <a:srgbClr val="F0FDF4"/>
                 </a:solidFill>
                 <a:latin typeface="Arial"/>
-                <a:ea typeface="Poppins Bold"/>
-                <a:cs typeface="Poppins Bold"/>
-                <a:sym typeface="Poppins Bold"/>
-              </a:rPr>
-              <a:t>ALLELUIA! ALLELUIA!</a:t>
-            </a:r>
-          </a:p>
-          <a:p>
-            <a:pPr algn="ctr">
-              <a:lnSpc>
-                <a:spcPts val="9659"/>
-              </a:lnSpc>
-              <a:defRPr/>
-            </a:pPr>
-            <a:r>
-              <a:rPr lang="en-US" sz="6900" b="1">
+              </a:rPr>
+              <a:t>alleluia. You are a chosen race, a royal priesthood, a holy nation; announce the praises of him who called you out of darkness into his wonderful light. R. Alleluia, alleluia.</a:t>
+            </a:r>
+          </a:p>
+          <a:p>
+            <a:pPr algn="ctr"/>
+            <a:r>
+              <a:rPr sz="6900" b="1">
                 <a:solidFill>
                   <a:srgbClr val="F0FDF4"/>
                 </a:solidFill>
                 <a:latin typeface="Arial"/>
-                <a:ea typeface="Poppins Bold"/>
-                <a:cs typeface="Poppins Bold"/>
-                <a:sym typeface="Poppins Bold"/>
-              </a:rPr>
-              <a:t>ALLELUIA! ALLELUIA!</a:t>
-            </a:r>
-          </a:p>
-          <a:p>
-            <a:pPr marL="0" lvl="0" indent="0" algn="ctr">
-              <a:lnSpc>
-                <a:spcPts val="9659"/>
-              </a:lnSpc>
-              <a:spcBef>
-                <a:spcPct val="0"/>
-              </a:spcBef>
-              <a:defRPr/>
-            </a:pPr>
-            <a:r>
-              <a:rPr lang="en-US" sz="6900" b="1">
-                <a:solidFill>
-                  <a:srgbClr val="F0FDF4"/>
-                </a:solidFill>
-                <a:latin typeface="Arial"/>
-                <a:ea typeface="Poppins Bold"/>
-                <a:cs typeface="Poppins Bold"/>
-                <a:sym typeface="Poppins Bold"/>
-              </a:rPr>
-              <a:t>ALLELUIA! ALLELUIA!</a:t>
+              </a:rPr>
+              <a:t>Alleluia, alleluia, alleluia!</a:t>
             </a:r>
           </a:p>
         </p:txBody>
@@ -7416,7 +7374,7 @@
           <a:noFill/>
         </p:spPr>
         <p:txBody>
-          <a:bodyPr wrap="square" lIns="109728" rIns="109728" tIns="73152" bIns="73152" anchor="ctr">
+          <a:bodyPr wrap="none" lIns="109728" rIns="109728" tIns="73152" bIns="73152" anchor="ctr">
             <a:noAutofit/>
           </a:bodyPr>
           <a:lstStyle/>
@@ -7503,7 +7461,7 @@
               <a:lnSpc>
                 <a:spcPct val="108000"/>
               </a:lnSpc>
-              <a:defRPr sz="3800" b="0" i="0" u="none">
+              <a:defRPr sz="3000" b="0" i="0" u="none">
                 <a:solidFill>
                   <a:srgbClr val="EFEDEC"/>
                 </a:solidFill>
@@ -7511,7 +7469,7 @@
               </a:defRPr>
             </a:pPr>
             <a:r>
-              <a:t>“He who loves father or mother more than me is not worthy of me;</a:t>
+              <a:t>“Whoever loves father or mother more than me is not worthy of me, and whoever loves son or daughter more than me is not worthy of me;</a:t>
             </a:r>
           </a:p>
           <a:p>
@@ -7519,7 +7477,7 @@
               <a:lnSpc>
                 <a:spcPct val="108000"/>
               </a:lnSpc>
-              <a:defRPr sz="3800" b="0" i="0" u="none">
+              <a:defRPr sz="3000" b="0" i="0" u="none">
                 <a:solidFill>
                   <a:srgbClr val="EFEDEC"/>
                 </a:solidFill>
@@ -7527,7 +7485,7 @@
               </a:defRPr>
             </a:pPr>
             <a:r>
-              <a:t>and he who loves son or daughter more than me isn't worthy of me.”</a:t>
+              <a:t>and whoever does not take up his cross and follow after me is not worthy of me.”</a:t>
             </a:r>
           </a:p>
         </p:txBody>
@@ -8638,7 +8596,7 @@
           <a:noFill/>
         </p:spPr>
         <p:txBody>
-          <a:bodyPr wrap="square" lIns="109728" rIns="109728" tIns="73152" bIns="73152" anchor="ctr">
+          <a:bodyPr wrap="none" lIns="109728" rIns="109728" tIns="73152" bIns="73152" anchor="ctr">
             <a:noAutofit/>
           </a:bodyPr>
           <a:lstStyle/>
@@ -8725,7 +8683,7 @@
               <a:lnSpc>
                 <a:spcPct val="108000"/>
               </a:lnSpc>
-              <a:defRPr sz="3800" b="0" i="0" u="none">
+              <a:defRPr sz="3000" b="0" i="0" u="none">
                 <a:solidFill>
                   <a:srgbClr val="EFEDEC"/>
                 </a:solidFill>
@@ -8733,7 +8691,7 @@
               </a:defRPr>
             </a:pPr>
             <a:r>
-              <a:t>“He who loves father or mother more than me is not worthy of me;</a:t>
+              <a:t>“Whoever loves father or mother more than me is not worthy of me, and whoever loves son or daughter more than me is not worthy of me;</a:t>
             </a:r>
           </a:p>
           <a:p>
@@ -8741,7 +8699,7 @@
               <a:lnSpc>
                 <a:spcPct val="108000"/>
               </a:lnSpc>
-              <a:defRPr sz="3800" b="0" i="0" u="none">
+              <a:defRPr sz="3000" b="0" i="0" u="none">
                 <a:solidFill>
                   <a:srgbClr val="EFEDEC"/>
                 </a:solidFill>
@@ -8749,7 +8707,7 @@
               </a:defRPr>
             </a:pPr>
             <a:r>
-              <a:t>and he who loves son or daughter more than me isn't worthy of me.”</a:t>
+              <a:t>and whoever does not take up his cross and follow after me is not worthy of me.”</a:t>
             </a:r>
           </a:p>
         </p:txBody>
@@ -8901,8 +8859,8 @@
         </p:nvSpPr>
         <p:spPr>
           <a:xfrm>
-            <a:off x="0" y="823874"/>
-            <a:ext cx="18288000" cy="4797856"/>
+            <a:off x="0" y="1097280"/>
+            <a:ext cx="18288000" cy="4457700"/>
           </a:xfrm>
           <a:prstGeom prst="rect">
             <a:avLst/>
@@ -8921,7 +8879,7 @@
               </a:lnSpc>
             </a:pPr>
             <a:r>
-              <a:rPr sz="6600" b="1" i="1">
+              <a:rPr sz="7400" b="1" i="1">
                 <a:solidFill>
                   <a:srgbClr val="FFB800"/>
                 </a:solidFill>
@@ -8937,13 +8895,13 @@
               </a:lnSpc>
             </a:pPr>
             <a:r>
-              <a:rPr sz="6600" b="1" i="1">
+              <a:rPr sz="7400" b="1" i="1">
                 <a:solidFill>
                   <a:srgbClr val="FFB800"/>
                 </a:solidFill>
                 <a:latin typeface="Poppins"/>
               </a:rPr>
-              <a:t>LET YOUR SONG BE SUNG FROM MOUNTAINS HIGH</a:t>
+              <a:t>LET YOUR SONG BE SUNG</a:t>
             </a:r>
           </a:p>
           <a:p>
@@ -8953,12 +8911,28 @@
               </a:lnSpc>
             </a:pPr>
             <a:r>
-              <a:rPr sz="6600" b="1" i="1">
+              <a:rPr sz="7400" b="1" i="1">
                 <a:solidFill>
                   <a:srgbClr val="FFB800"/>
                 </a:solidFill>
                 <a:latin typeface="Poppins"/>
               </a:rPr>
+              <a:t>FROM MOUNTAINS HIGH</a:t>
+            </a:r>
+          </a:p>
+          <a:p>
+            <a:pPr algn="ctr">
+              <a:lnSpc>
+                <a:spcPct val="70000"/>
+              </a:lnSpc>
+            </a:pPr>
+            <a:r>
+              <a:rPr sz="7400" b="1" i="1">
+                <a:solidFill>
+                  <a:srgbClr val="FFB800"/>
+                </a:solidFill>
+                <a:latin typeface="Poppins"/>
+              </a:rPr>
               <a:t>SING A NEW SONG UNTO THE LORD</a:t>
             </a:r>
           </a:p>
@@ -8969,7 +8943,7 @@
               </a:lnSpc>
             </a:pPr>
             <a:r>
-              <a:rPr sz="6600" b="1" i="1">
+              <a:rPr sz="7400" b="1" i="1">
                 <a:solidFill>
                   <a:srgbClr val="FFB800"/>
                 </a:solidFill>
@@ -8988,8 +8962,8 @@
         </p:nvSpPr>
         <p:spPr>
           <a:xfrm>
-            <a:off x="0" y="5471769"/>
-            <a:ext cx="18288000" cy="4797856"/>
+            <a:off x="0" y="5829300"/>
+            <a:ext cx="18288000" cy="4457700"/>
           </a:xfrm>
           <a:prstGeom prst="rect">
             <a:avLst/>
@@ -9008,7 +8982,7 @@
               </a:lnSpc>
             </a:pPr>
             <a:r>
-              <a:rPr sz="7500" b="1" i="0">
+              <a:rPr sz="6600" b="1" i="0">
                 <a:solidFill>
                   <a:srgbClr val="FFFFFF"/>
                 </a:solidFill>
@@ -9024,7 +8998,7 @@
               </a:lnSpc>
             </a:pPr>
             <a:r>
-              <a:rPr sz="7500" b="1" i="0">
+              <a:rPr sz="6600" b="1" i="0">
                 <a:solidFill>
                   <a:srgbClr val="FFFFFF"/>
                 </a:solidFill>
@@ -9040,7 +9014,7 @@
               </a:lnSpc>
             </a:pPr>
             <a:r>
-              <a:rPr sz="7500" b="1" i="0">
+              <a:rPr sz="6600" b="1" i="0">
                 <a:solidFill>
                   <a:srgbClr val="FFFFFF"/>
                 </a:solidFill>
@@ -9056,7 +9030,7 @@
               </a:lnSpc>
             </a:pPr>
             <a:r>
-              <a:rPr sz="7500" b="1" i="0">
+              <a:rPr sz="6600" b="1" i="0">
                 <a:solidFill>
                   <a:srgbClr val="FFFFFF"/>
                 </a:solidFill>
@@ -9692,7 +9666,7 @@
           <a:noFill/>
         </p:spPr>
         <p:txBody>
-          <a:bodyPr wrap="square" lIns="109728" rIns="109728" tIns="73152" bIns="73152" anchor="ctr">
+          <a:bodyPr wrap="none" lIns="109728" rIns="109728" tIns="73152" bIns="73152" anchor="ctr">
             <a:noAutofit/>
           </a:bodyPr>
           <a:lstStyle/>
@@ -9779,7 +9753,7 @@
               <a:lnSpc>
                 <a:spcPct val="108000"/>
               </a:lnSpc>
-              <a:defRPr sz="3800" b="0" i="0" u="none">
+              <a:defRPr sz="3000" b="0" i="0" u="none">
                 <a:solidFill>
                   <a:srgbClr val="EFEDEC"/>
                 </a:solidFill>
@@ -9787,7 +9761,7 @@
               </a:defRPr>
             </a:pPr>
             <a:r>
-              <a:t>“He who loves father or mother more than me is not worthy of me;</a:t>
+              <a:t>“Whoever loves father or mother more than me is not worthy of me, and whoever loves son or daughter more than me is not worthy of me;</a:t>
             </a:r>
           </a:p>
           <a:p>
@@ -9795,7 +9769,7 @@
               <a:lnSpc>
                 <a:spcPct val="108000"/>
               </a:lnSpc>
-              <a:defRPr sz="3800" b="0" i="0" u="none">
+              <a:defRPr sz="3000" b="0" i="0" u="none">
                 <a:solidFill>
                   <a:srgbClr val="EFEDEC"/>
                 </a:solidFill>
@@ -9803,7 +9777,7 @@
               </a:defRPr>
             </a:pPr>
             <a:r>
-              <a:t>and he who loves son or daughter more than me isn't worthy of me.”</a:t>
+              <a:t>and whoever does not take up his cross and follow after me is not worthy of me.”</a:t>
             </a:r>
           </a:p>
         </p:txBody>
@@ -9955,8 +9929,8 @@
         </p:nvSpPr>
         <p:spPr>
           <a:xfrm>
-            <a:off x="0" y="823874"/>
-            <a:ext cx="18288000" cy="4797856"/>
+            <a:off x="0" y="1097280"/>
+            <a:ext cx="18288000" cy="4457700"/>
           </a:xfrm>
           <a:prstGeom prst="rect">
             <a:avLst/>
@@ -10042,8 +10016,8 @@
         </p:nvSpPr>
         <p:spPr>
           <a:xfrm>
-            <a:off x="0" y="5471769"/>
-            <a:ext cx="18288000" cy="4797856"/>
+            <a:off x="0" y="5829300"/>
+            <a:ext cx="18288000" cy="4457700"/>
           </a:xfrm>
           <a:prstGeom prst="rect">
             <a:avLst/>
@@ -10062,7 +10036,7 @@
               </a:lnSpc>
             </a:pPr>
             <a:r>
-              <a:rPr sz="7500" b="1" i="1">
+              <a:rPr sz="7200" b="1" i="1">
                 <a:solidFill>
                   <a:srgbClr val="FFFFFF"/>
                 </a:solidFill>
@@ -10078,7 +10052,7 @@
               </a:lnSpc>
             </a:pPr>
             <a:r>
-              <a:rPr sz="7500" b="1" i="1">
+              <a:rPr sz="7200" b="1" i="1">
                 <a:solidFill>
                   <a:srgbClr val="FFFFFF"/>
                 </a:solidFill>
@@ -10094,7 +10068,7 @@
               </a:lnSpc>
             </a:pPr>
             <a:r>
-              <a:rPr sz="7500" b="1" i="1">
+              <a:rPr sz="7200" b="1" i="1">
                 <a:solidFill>
                   <a:srgbClr val="FFFFFF"/>
                 </a:solidFill>
@@ -10110,7 +10084,7 @@
               </a:lnSpc>
             </a:pPr>
             <a:r>
-              <a:rPr sz="7500" b="1" i="1">
+              <a:rPr sz="7200" b="1" i="1">
                 <a:solidFill>
                   <a:srgbClr val="FFFFFF"/>
                 </a:solidFill>
@@ -10195,8 +10169,8 @@
         </p:nvSpPr>
         <p:spPr>
           <a:xfrm>
-            <a:off x="0" y="442569"/>
-            <a:ext cx="18288000" cy="4797856"/>
+            <a:off x="0" y="0"/>
+            <a:ext cx="18288000" cy="5006340"/>
           </a:xfrm>
           <a:prstGeom prst="rect">
             <a:avLst/>
@@ -10282,8 +10256,8 @@
         </p:nvSpPr>
         <p:spPr>
           <a:xfrm>
-            <a:off x="0" y="5091379"/>
-            <a:ext cx="18288000" cy="4797856"/>
+            <a:off x="0" y="5280660"/>
+            <a:ext cx="18288000" cy="5006340"/>
           </a:xfrm>
           <a:prstGeom prst="rect">
             <a:avLst/>
@@ -10302,7 +10276,7 @@
               </a:lnSpc>
             </a:pPr>
             <a:r>
-              <a:rPr sz="7400" b="1" i="1">
+              <a:rPr sz="6400" b="1" i="1">
                 <a:solidFill>
                   <a:srgbClr val="FFFFFF"/>
                 </a:solidFill>
@@ -10318,7 +10292,7 @@
               </a:lnSpc>
             </a:pPr>
             <a:r>
-              <a:rPr sz="7400" b="1" i="1">
+              <a:rPr sz="6400" b="1" i="1">
                 <a:solidFill>
                   <a:srgbClr val="FFFFFF"/>
                 </a:solidFill>
@@ -10334,7 +10308,7 @@
               </a:lnSpc>
             </a:pPr>
             <a:r>
-              <a:rPr sz="7400" b="1" i="1">
+              <a:rPr sz="6400" b="1" i="1">
                 <a:solidFill>
                   <a:srgbClr val="FFFFFF"/>
                 </a:solidFill>
@@ -10350,7 +10324,7 @@
               </a:lnSpc>
             </a:pPr>
             <a:r>
-              <a:rPr sz="7400" b="1" i="1">
+              <a:rPr sz="6400" b="1" i="1">
                 <a:solidFill>
                   <a:srgbClr val="FFFFFF"/>
                 </a:solidFill>
@@ -11365,8 +11339,8 @@
         </p:nvSpPr>
         <p:spPr>
           <a:xfrm>
-            <a:off x="0" y="442569"/>
-            <a:ext cx="18288000" cy="4797856"/>
+            <a:off x="0" y="0"/>
+            <a:ext cx="18288000" cy="5006340"/>
           </a:xfrm>
           <a:prstGeom prst="rect">
             <a:avLst/>
@@ -11385,7 +11359,7 @@
               </a:lnSpc>
             </a:pPr>
             <a:r>
-              <a:rPr sz="6600" b="1" i="1">
+              <a:rPr sz="7400" b="1" i="1">
                 <a:solidFill>
                   <a:srgbClr val="FFB800"/>
                 </a:solidFill>
@@ -11401,13 +11375,13 @@
               </a:lnSpc>
             </a:pPr>
             <a:r>
-              <a:rPr sz="6600" b="1" i="1">
+              <a:rPr sz="7400" b="1" i="1">
                 <a:solidFill>
                   <a:srgbClr val="FFB800"/>
                 </a:solidFill>
                 <a:latin typeface="Poppins"/>
               </a:rPr>
-              <a:t>LET YOUR SONG BE SUNG FROM MOUNTAINS HIGH</a:t>
+              <a:t>LET YOUR SONG BE SUNG</a:t>
             </a:r>
           </a:p>
           <a:p>
@@ -11417,12 +11391,28 @@
               </a:lnSpc>
             </a:pPr>
             <a:r>
-              <a:rPr sz="6600" b="1" i="1">
+              <a:rPr sz="7400" b="1" i="1">
                 <a:solidFill>
                   <a:srgbClr val="FFB800"/>
                 </a:solidFill>
                 <a:latin typeface="Poppins"/>
               </a:rPr>
+              <a:t>FROM MOUNTAINS HIGH</a:t>
+            </a:r>
+          </a:p>
+          <a:p>
+            <a:pPr algn="ctr">
+              <a:lnSpc>
+                <a:spcPct val="70000"/>
+              </a:lnSpc>
+            </a:pPr>
+            <a:r>
+              <a:rPr sz="7400" b="1" i="1">
+                <a:solidFill>
+                  <a:srgbClr val="FFB800"/>
+                </a:solidFill>
+                <a:latin typeface="Poppins"/>
+              </a:rPr>
               <a:t>SING A NEW SONG UNTO THE LORD</a:t>
             </a:r>
           </a:p>
@@ -11433,7 +11423,7 @@
               </a:lnSpc>
             </a:pPr>
             <a:r>
-              <a:rPr sz="6600" b="1" i="1">
+              <a:rPr sz="7400" b="1" i="1">
                 <a:solidFill>
                   <a:srgbClr val="FFB800"/>
                 </a:solidFill>
@@ -11452,8 +11442,8 @@
         </p:nvSpPr>
         <p:spPr>
           <a:xfrm>
-            <a:off x="0" y="5091379"/>
-            <a:ext cx="18288000" cy="4797856"/>
+            <a:off x="0" y="5280660"/>
+            <a:ext cx="18288000" cy="5006340"/>
           </a:xfrm>
           <a:prstGeom prst="rect">
             <a:avLst/>
@@ -11472,7 +11462,7 @@
               </a:lnSpc>
             </a:pPr>
             <a:r>
-              <a:rPr sz="7500" b="1" i="0">
+              <a:rPr sz="7400" b="1" i="0">
                 <a:solidFill>
                   <a:srgbClr val="FFFFFF"/>
                 </a:solidFill>
@@ -11488,7 +11478,7 @@
               </a:lnSpc>
             </a:pPr>
             <a:r>
-              <a:rPr sz="7500" b="1" i="0">
+              <a:rPr sz="7400" b="1" i="0">
                 <a:solidFill>
                   <a:srgbClr val="FFFFFF"/>
                 </a:solidFill>
@@ -11504,7 +11494,7 @@
               </a:lnSpc>
             </a:pPr>
             <a:r>
-              <a:rPr sz="7500" b="1" i="0">
+              <a:rPr sz="7400" b="1" i="0">
                 <a:solidFill>
                   <a:srgbClr val="FFFFFF"/>
                 </a:solidFill>
@@ -11520,7 +11510,7 @@
               </a:lnSpc>
             </a:pPr>
             <a:r>
-              <a:rPr sz="7500" b="1" i="0">
+              <a:rPr sz="7400" b="1" i="0">
                 <a:solidFill>
                   <a:srgbClr val="FFFFFF"/>
                 </a:solidFill>
@@ -13160,7 +13150,7 @@
           <a:noFill/>
         </p:spPr>
         <p:txBody>
-          <a:bodyPr wrap="square" lIns="109728" rIns="109728" tIns="73152" bIns="73152" anchor="ctr">
+          <a:bodyPr wrap="none" lIns="109728" rIns="109728" tIns="73152" bIns="73152" anchor="ctr">
             <a:noAutofit/>
           </a:bodyPr>
           <a:lstStyle/>
@@ -13247,7 +13237,7 @@
               <a:lnSpc>
                 <a:spcPct val="108000"/>
               </a:lnSpc>
-              <a:defRPr sz="3800" b="0" i="0" u="none">
+              <a:defRPr sz="3000" b="0" i="0" u="none">
                 <a:solidFill>
                   <a:srgbClr val="EFEDEC"/>
                 </a:solidFill>
@@ -13255,7 +13245,7 @@
               </a:defRPr>
             </a:pPr>
             <a:r>
-              <a:t>“He who loves father or mother more than me is not worthy of me;</a:t>
+              <a:t>“Whoever loves father or mother more than me is not worthy of me, and whoever loves son or daughter more than me is not worthy of me;</a:t>
             </a:r>
           </a:p>
           <a:p>
@@ -13263,7 +13253,7 @@
               <a:lnSpc>
                 <a:spcPct val="108000"/>
               </a:lnSpc>
-              <a:defRPr sz="3800" b="0" i="0" u="none">
+              <a:defRPr sz="3000" b="0" i="0" u="none">
                 <a:solidFill>
                   <a:srgbClr val="EFEDEC"/>
                 </a:solidFill>
@@ -13271,7 +13261,7 @@
               </a:defRPr>
             </a:pPr>
             <a:r>
-              <a:t>and he who loves son or daughter more than me isn't worthy of me.”</a:t>
+              <a:t>and whoever does not take up his cross and follow after me is not worthy of me.”</a:t>
             </a:r>
           </a:p>
         </p:txBody>
@@ -13783,7 +13773,7 @@
               </a:lnSpc>
             </a:pPr>
             <a:r>
-              <a:rPr sz="6600" b="1" i="1">
+              <a:rPr sz="7200" b="1" i="1">
                 <a:solidFill>
                   <a:srgbClr val="FFB800"/>
                 </a:solidFill>
@@ -13799,13 +13789,13 @@
               </a:lnSpc>
             </a:pPr>
             <a:r>
-              <a:rPr sz="6600" b="1" i="1">
+              <a:rPr sz="7200" b="1" i="1">
                 <a:solidFill>
                   <a:srgbClr val="FFB800"/>
                 </a:solidFill>
                 <a:latin typeface="Poppins"/>
               </a:rPr>
-              <a:t>LET YOUR SONG BE SUNG FROM MOUNTAINS HIGH</a:t>
+              <a:t>LET YOUR SONG BE SUNG</a:t>
             </a:r>
           </a:p>
           <a:p>
@@ -13815,12 +13805,28 @@
               </a:lnSpc>
             </a:pPr>
             <a:r>
-              <a:rPr sz="6600" b="1" i="1">
+              <a:rPr sz="7200" b="1" i="1">
                 <a:solidFill>
                   <a:srgbClr val="FFB800"/>
                 </a:solidFill>
                 <a:latin typeface="Poppins"/>
               </a:rPr>
+              <a:t>FROM MOUNTAINS HIGH</a:t>
+            </a:r>
+          </a:p>
+          <a:p>
+            <a:pPr algn="ctr">
+              <a:lnSpc>
+                <a:spcPct val="70000"/>
+              </a:lnSpc>
+            </a:pPr>
+            <a:r>
+              <a:rPr sz="7200" b="1" i="1">
+                <a:solidFill>
+                  <a:srgbClr val="FFB800"/>
+                </a:solidFill>
+                <a:latin typeface="Poppins"/>
+              </a:rPr>
               <a:t>SING A NEW SONG UNTO THE LORD</a:t>
             </a:r>
           </a:p>
@@ -13831,7 +13837,7 @@
               </a:lnSpc>
             </a:pPr>
             <a:r>
-              <a:rPr sz="6600" b="1" i="1">
+              <a:rPr sz="7200" b="1" i="1">
                 <a:solidFill>
                   <a:srgbClr val="FFB800"/>
                 </a:solidFill>
@@ -13847,7 +13853,7 @@
               </a:lnSpc>
             </a:pPr>
             <a:r>
-              <a:rPr sz="6600" b="1" i="1">
+              <a:rPr sz="7200" b="1" i="1">
                 <a:solidFill>
                   <a:srgbClr val="FFB800"/>
                 </a:solidFill>
@@ -14731,7 +14737,7 @@
           <a:noFill/>
         </p:spPr>
         <p:txBody>
-          <a:bodyPr wrap="square" lIns="109728" rIns="109728" tIns="73152" bIns="73152" anchor="ctr">
+          <a:bodyPr wrap="none" lIns="109728" rIns="109728" tIns="73152" bIns="73152" anchor="ctr">
             <a:noAutofit/>
           </a:bodyPr>
           <a:lstStyle/>
@@ -14818,7 +14824,7 @@
               <a:lnSpc>
                 <a:spcPct val="108000"/>
               </a:lnSpc>
-              <a:defRPr sz="3800" b="0" i="0" u="none">
+              <a:defRPr sz="3000" b="0" i="0" u="none">
                 <a:solidFill>
                   <a:srgbClr val="EFEDEC"/>
                 </a:solidFill>
@@ -14826,7 +14832,7 @@
               </a:defRPr>
             </a:pPr>
             <a:r>
-              <a:t>“He who loves father or mother more than me is not worthy of me;</a:t>
+              <a:t>“Whoever loves father or mother more than me is not worthy of me, and whoever loves son or daughter more than me is not worthy of me;</a:t>
             </a:r>
           </a:p>
           <a:p>
@@ -14834,7 +14840,7 @@
               <a:lnSpc>
                 <a:spcPct val="108000"/>
               </a:lnSpc>
-              <a:defRPr sz="3800" b="0" i="0" u="none">
+              <a:defRPr sz="3000" b="0" i="0" u="none">
                 <a:solidFill>
                   <a:srgbClr val="EFEDEC"/>
                 </a:solidFill>
@@ -14842,7 +14848,7 @@
               </a:defRPr>
             </a:pPr>
             <a:r>
-              <a:t>and he who loves son or daughter more than me isn't worthy of me.”</a:t>
+              <a:t>and whoever does not take up his cross and follow after me is not worthy of me.”</a:t>
             </a:r>
           </a:p>
         </p:txBody>
@@ -14994,8 +15000,8 @@
         </p:nvSpPr>
         <p:spPr>
           <a:xfrm>
-            <a:off x="0" y="823874"/>
-            <a:ext cx="18288000" cy="4797856"/>
+            <a:off x="0" y="1097280"/>
+            <a:ext cx="18288000" cy="4457700"/>
           </a:xfrm>
           <a:prstGeom prst="rect">
             <a:avLst/>
@@ -15014,7 +15020,7 @@
               </a:lnSpc>
             </a:pPr>
             <a:r>
-              <a:rPr sz="7200" b="1" i="0">
+              <a:rPr sz="6200" b="1" i="0">
                 <a:solidFill>
                   <a:srgbClr val="FFFFFF"/>
                 </a:solidFill>
@@ -15030,7 +15036,7 @@
               </a:lnSpc>
             </a:pPr>
             <a:r>
-              <a:rPr sz="7200" b="1" i="0">
+              <a:rPr sz="6200" b="1" i="0">
                 <a:solidFill>
                   <a:srgbClr val="FFFFFF"/>
                 </a:solidFill>
@@ -15046,7 +15052,7 @@
               </a:lnSpc>
             </a:pPr>
             <a:r>
-              <a:rPr sz="7200" b="1" i="0">
+              <a:rPr sz="6200" b="1" i="0">
                 <a:solidFill>
                   <a:srgbClr val="FFFFFF"/>
                 </a:solidFill>
@@ -15062,7 +15068,7 @@
               </a:lnSpc>
             </a:pPr>
             <a:r>
-              <a:rPr sz="7200" b="1" i="0">
+              <a:rPr sz="6200" b="1" i="0">
                 <a:solidFill>
                   <a:srgbClr val="FFFFFF"/>
                 </a:solidFill>
@@ -15081,8 +15087,8 @@
         </p:nvSpPr>
         <p:spPr>
           <a:xfrm>
-            <a:off x="0" y="5471769"/>
-            <a:ext cx="18288000" cy="4797856"/>
+            <a:off x="0" y="5829300"/>
+            <a:ext cx="18288000" cy="4457700"/>
           </a:xfrm>
           <a:prstGeom prst="rect">
             <a:avLst/>
@@ -15101,7 +15107,7 @@
               </a:lnSpc>
             </a:pPr>
             <a:r>
-              <a:rPr sz="6800" b="1" i="1">
+              <a:rPr sz="5800" b="1" i="1">
                 <a:solidFill>
                   <a:srgbClr val="FFFFFF"/>
                 </a:solidFill>
@@ -15117,7 +15123,7 @@
               </a:lnSpc>
             </a:pPr>
             <a:r>
-              <a:rPr sz="6800" b="1" i="1">
+              <a:rPr sz="5800" b="1" i="1">
                 <a:solidFill>
                   <a:srgbClr val="FFFFFF"/>
                 </a:solidFill>
@@ -15133,7 +15139,7 @@
               </a:lnSpc>
             </a:pPr>
             <a:r>
-              <a:rPr sz="6800" b="1" i="1">
+              <a:rPr sz="5800" b="1" i="1">
                 <a:solidFill>
                   <a:srgbClr val="FFFFFF"/>
                 </a:solidFill>
@@ -15149,7 +15155,7 @@
               </a:lnSpc>
             </a:pPr>
             <a:r>
-              <a:rPr sz="6800" b="1" i="1">
+              <a:rPr sz="5800" b="1" i="1">
                 <a:solidFill>
                   <a:srgbClr val="FFFFFF"/>
                 </a:solidFill>
@@ -15234,8 +15240,8 @@
         </p:nvSpPr>
         <p:spPr>
           <a:xfrm>
-            <a:off x="0" y="442569"/>
-            <a:ext cx="18288000" cy="4797856"/>
+            <a:off x="0" y="0"/>
+            <a:ext cx="18288000" cy="5006340"/>
           </a:xfrm>
           <a:prstGeom prst="rect">
             <a:avLst/>
@@ -15337,8 +15343,8 @@
         </p:nvSpPr>
         <p:spPr>
           <a:xfrm>
-            <a:off x="0" y="5091379"/>
-            <a:ext cx="18288000" cy="4797856"/>
+            <a:off x="0" y="5280660"/>
+            <a:ext cx="18288000" cy="5006340"/>
           </a:xfrm>
           <a:prstGeom prst="rect">
             <a:avLst/>
@@ -15357,7 +15363,7 @@
               </a:lnSpc>
             </a:pPr>
             <a:r>
-              <a:rPr sz="6200" b="1" i="0">
+              <a:rPr sz="5400" b="1" i="0">
                 <a:solidFill>
                   <a:srgbClr val="FFFFFF"/>
                 </a:solidFill>
@@ -15373,7 +15379,7 @@
               </a:lnSpc>
             </a:pPr>
             <a:r>
-              <a:rPr sz="6200" b="1" i="0">
+              <a:rPr sz="5400" b="1" i="0">
                 <a:solidFill>
                   <a:srgbClr val="FFFFFF"/>
                 </a:solidFill>
@@ -15389,7 +15395,7 @@
               </a:lnSpc>
             </a:pPr>
             <a:r>
-              <a:rPr sz="6200" b="1" i="0">
+              <a:rPr sz="5400" b="1" i="0">
                 <a:solidFill>
                   <a:srgbClr val="FFFFFF"/>
                 </a:solidFill>
@@ -15474,8 +15480,8 @@
         </p:nvSpPr>
         <p:spPr>
           <a:xfrm>
-            <a:off x="0" y="442569"/>
-            <a:ext cx="18288000" cy="4797856"/>
+            <a:off x="0" y="0"/>
+            <a:ext cx="18288000" cy="5006340"/>
           </a:xfrm>
           <a:prstGeom prst="rect">
             <a:avLst/>
@@ -15577,8 +15583,8 @@
         </p:nvSpPr>
         <p:spPr>
           <a:xfrm>
-            <a:off x="0" y="5091379"/>
-            <a:ext cx="18288000" cy="4797856"/>
+            <a:off x="0" y="5280660"/>
+            <a:ext cx="18288000" cy="5006340"/>
           </a:xfrm>
           <a:prstGeom prst="rect">
             <a:avLst/>
@@ -15597,7 +15603,7 @@
               </a:lnSpc>
             </a:pPr>
             <a:r>
-              <a:rPr sz="7200" b="1" i="0">
+              <a:rPr sz="7000" b="1" i="0">
                 <a:solidFill>
                   <a:srgbClr val="FFFFFF"/>
                 </a:solidFill>
@@ -15613,7 +15619,7 @@
               </a:lnSpc>
             </a:pPr>
             <a:r>
-              <a:rPr sz="7200" b="1" i="0">
+              <a:rPr sz="7000" b="1" i="0">
                 <a:solidFill>
                   <a:srgbClr val="FFFFFF"/>
                 </a:solidFill>
@@ -15629,7 +15635,7 @@
               </a:lnSpc>
             </a:pPr>
             <a:r>
-              <a:rPr sz="7200" b="1" i="0">
+              <a:rPr sz="7000" b="1" i="0">
                 <a:solidFill>
                   <a:srgbClr val="FFFFFF"/>
                 </a:solidFill>
@@ -15645,7 +15651,7 @@
               </a:lnSpc>
             </a:pPr>
             <a:r>
-              <a:rPr sz="7200" b="1" i="0">
+              <a:rPr sz="7000" b="1" i="0">
                 <a:solidFill>
                   <a:srgbClr val="FFFFFF"/>
                 </a:solidFill>
@@ -15661,7 +15667,7 @@
               </a:lnSpc>
             </a:pPr>
             <a:r>
-              <a:rPr sz="7200" b="1" i="0">
+              <a:rPr sz="7000" b="1" i="0">
                 <a:solidFill>
                   <a:srgbClr val="FFFFFF"/>
                 </a:solidFill>
@@ -15677,7 +15683,7 @@
               </a:lnSpc>
             </a:pPr>
             <a:r>
-              <a:rPr sz="7200" b="1" i="0">
+              <a:rPr sz="7000" b="1" i="0">
                 <a:solidFill>
                   <a:srgbClr val="FFFFFF"/>
                 </a:solidFill>
@@ -15784,7 +15790,7 @@
                 </a:solidFill>
                 <a:latin typeface="Georgia"/>
               </a:rPr>
-              <a:t>We Give Thee But Thine Own</a:t>
+              <a:t>Isang Bansa</a:t>
             </a:r>
           </a:p>
         </p:txBody>
@@ -15797,8 +15803,8 @@
         </p:nvSpPr>
         <p:spPr>
           <a:xfrm>
-            <a:off x="0" y="823874"/>
-            <a:ext cx="18288000" cy="4797856"/>
+            <a:off x="0" y="1097280"/>
+            <a:ext cx="18288000" cy="4457700"/>
           </a:xfrm>
           <a:prstGeom prst="rect">
             <a:avLst/>
@@ -15823,7 +15829,7 @@
                 </a:solidFill>
                 <a:latin typeface="Poppins"/>
               </a:rPr>
-              <a:t>WE GIVE THEE BUT THINE OWN,</a:t>
+              <a:t>OH KAY GANDA NG ATING BUHAY</a:t>
             </a:r>
           </a:p>
           <a:p>
@@ -15839,7 +15845,7 @@
                 </a:solidFill>
                 <a:latin typeface="Poppins"/>
               </a:rPr>
-              <a:t>WHATE'ER THE GIFT MAY BE;</a:t>
+              <a:t>NAPUPUSPOS NG PAGPAPALA</a:t>
             </a:r>
           </a:p>
           <a:p>
@@ -15855,7 +15861,7 @@
                 </a:solidFill>
                 <a:latin typeface="Poppins"/>
               </a:rPr>
-              <a:t>ALL THAT WE HAVE IS THINE ALONE,</a:t>
+              <a:t>NG SAKRAMENTONG MAHIWAGA</a:t>
             </a:r>
           </a:p>
           <a:p>
@@ -15871,7 +15877,7 @@
                 </a:solidFill>
                 <a:latin typeface="Poppins"/>
               </a:rPr>
-              <a:t>A TRUST, O LORD, FROM THEE.</a:t>
+              <a:t>KALOOB NI HESUS SA’TING GABAY</a:t>
             </a:r>
           </a:p>
         </p:txBody>
@@ -15884,8 +15890,8 @@
         </p:nvSpPr>
         <p:spPr>
           <a:xfrm>
-            <a:off x="0" y="5471769"/>
-            <a:ext cx="18288000" cy="4797856"/>
+            <a:off x="0" y="5829300"/>
+            <a:ext cx="18288000" cy="4457700"/>
           </a:xfrm>
           <a:prstGeom prst="rect">
             <a:avLst/>
@@ -15910,7 +15916,7 @@
                 </a:solidFill>
                 <a:latin typeface="Poppins"/>
               </a:rPr>
-              <a:t>MAY WE THY BOUNTIES THUS</a:t>
+              <a:t>OH KAY TAMIS NG PAGSASAMA</a:t>
             </a:r>
           </a:p>
           <a:p>
@@ -15926,7 +15932,7 @@
                 </a:solidFill>
                 <a:latin typeface="Poppins"/>
               </a:rPr>
-              <a:t>AS STEWARDS TRUE RECEIVE,</a:t>
+              <a:t>NAGMUMULA SA PAGKAKAISA</a:t>
             </a:r>
           </a:p>
           <a:p>
@@ -15942,7 +15948,7 @@
                 </a:solidFill>
                 <a:latin typeface="Poppins"/>
               </a:rPr>
-              <a:t>AND GLADLY, AS THOU BLESSEST US,</a:t>
+              <a:t>BUMUBUKAL SA PAGSASALO</a:t>
             </a:r>
           </a:p>
           <a:p>
@@ -15958,7 +15964,7 @@
                 </a:solidFill>
                 <a:latin typeface="Poppins"/>
               </a:rPr>
-              <a:t>TO THEE OUR FIRSTFRUITS GIVE.</a:t>
+              <a:t>SA IISANG HAPAG AY DUMALO</a:t>
             </a:r>
           </a:p>
         </p:txBody>
@@ -16037,8 +16043,8 @@
         </p:nvSpPr>
         <p:spPr>
           <a:xfrm>
-            <a:off x="0" y="442569"/>
-            <a:ext cx="18288000" cy="4797856"/>
+            <a:off x="0" y="0"/>
+            <a:ext cx="18288000" cy="10287000"/>
           </a:xfrm>
           <a:prstGeom prst="rect">
             <a:avLst/>
@@ -16063,7 +16069,7 @@
                 </a:solidFill>
                 <a:latin typeface="Poppins"/>
               </a:rPr>
-              <a:t>TO COMFORT AND TO BLESS,</a:t>
+              <a:t>PURIHIN SI HESUS SA SAKRAMENTO</a:t>
             </a:r>
           </a:p>
           <a:p>
@@ -16079,7 +16085,7 @@
                 </a:solidFill>
                 <a:latin typeface="Poppins"/>
               </a:rPr>
-              <a:t>TO FIND A BALM FOR WOE,</a:t>
+              <a:t>PURIHIN NG LAHAT NG TAO</a:t>
             </a:r>
           </a:p>
           <a:p>
@@ -16095,7 +16101,7 @@
                 </a:solidFill>
                 <a:latin typeface="Poppins"/>
               </a:rPr>
-              <a:t>TO TEND THE LONE AND FATHERLESS,</a:t>
+              <a:t>PURIHIN SIYA NG PILIPINO</a:t>
             </a:r>
           </a:p>
           <a:p>
@@ -16111,7 +16117,7 @@
                 </a:solidFill>
                 <a:latin typeface="Poppins"/>
               </a:rPr>
-              <a:t>IS ANGELS' WORK BELOW.</a:t>
+              <a:t>SA PAGKAKAISA’Y LINGAPIN MO</a:t>
             </a:r>
           </a:p>
         </p:txBody>
@@ -16119,93 +16125,6 @@
       <p:sp>
         <p:nvSpPr>
           <p:cNvPr id="3" name="TextBox 2"/>
-          <p:cNvSpPr txBox="1"/>
-          <p:nvPr/>
-        </p:nvSpPr>
-        <p:spPr>
-          <a:xfrm>
-            <a:off x="0" y="5091379"/>
-            <a:ext cx="18288000" cy="4797856"/>
-          </a:xfrm>
-          <a:prstGeom prst="rect">
-            <a:avLst/>
-          </a:prstGeom>
-          <a:noFill/>
-        </p:spPr>
-        <p:txBody>
-          <a:bodyPr wrap="square" lIns="0" rIns="0" tIns="73152" bIns="73152" anchor="ctr">
-            <a:noAutofit/>
-          </a:bodyPr>
-          <a:lstStyle/>
-          <a:p>
-            <a:pPr algn="ctr">
-              <a:lnSpc>
-                <a:spcPct val="70000"/>
-              </a:lnSpc>
-            </a:pPr>
-            <a:r>
-              <a:rPr sz="7500" b="1" i="1">
-                <a:solidFill>
-                  <a:srgbClr val="FFFFFF"/>
-                </a:solidFill>
-                <a:latin typeface="Poppins"/>
-              </a:rPr>
-              <a:t>THE CAPTIVE TO RELEASE,</a:t>
-            </a:r>
-          </a:p>
-          <a:p>
-            <a:pPr algn="ctr">
-              <a:lnSpc>
-                <a:spcPct val="70000"/>
-              </a:lnSpc>
-            </a:pPr>
-            <a:r>
-              <a:rPr sz="7500" b="1" i="1">
-                <a:solidFill>
-                  <a:srgbClr val="FFFFFF"/>
-                </a:solidFill>
-                <a:latin typeface="Poppins"/>
-              </a:rPr>
-              <a:t>TO GOD THE LOST TO BRING,</a:t>
-            </a:r>
-          </a:p>
-          <a:p>
-            <a:pPr algn="ctr">
-              <a:lnSpc>
-                <a:spcPct val="70000"/>
-              </a:lnSpc>
-            </a:pPr>
-            <a:r>
-              <a:rPr sz="7500" b="1" i="1">
-                <a:solidFill>
-                  <a:srgbClr val="FFFFFF"/>
-                </a:solidFill>
-                <a:latin typeface="Poppins"/>
-              </a:rPr>
-              <a:t>TO TEACH THE WAY OF LIFE AND PEACE,</a:t>
-            </a:r>
-          </a:p>
-          <a:p>
-            <a:pPr algn="ctr">
-              <a:lnSpc>
-                <a:spcPct val="70000"/>
-              </a:lnSpc>
-            </a:pPr>
-            <a:r>
-              <a:rPr sz="7500" b="1" i="1">
-                <a:solidFill>
-                  <a:srgbClr val="FFFFFF"/>
-                </a:solidFill>
-                <a:latin typeface="Poppins"/>
-              </a:rPr>
-              <a:t>IT IS A CHRIST-LIKE THING.</a:t>
-            </a:r>
-          </a:p>
-        </p:txBody>
-      </p:sp>
-      <p:sp>
-        <p:nvSpPr>
-          <p:cNvPr id="4" name="TextBox 3"/>
           <p:cNvSpPr txBox="1"/>
           <p:nvPr/>
         </p:nvSpPr>
@@ -16603,7 +16522,7 @@
           <a:noFill/>
         </p:spPr>
         <p:txBody>
-          <a:bodyPr wrap="square" lIns="109728" rIns="109728" tIns="73152" bIns="73152" anchor="ctr">
+          <a:bodyPr wrap="none" lIns="109728" rIns="109728" tIns="73152" bIns="73152" anchor="ctr">
             <a:noAutofit/>
           </a:bodyPr>
           <a:lstStyle/>
@@ -16690,7 +16609,7 @@
               <a:lnSpc>
                 <a:spcPct val="108000"/>
               </a:lnSpc>
-              <a:defRPr sz="3800" b="0" i="0" u="none">
+              <a:defRPr sz="3000" b="0" i="0" u="none">
                 <a:solidFill>
                   <a:srgbClr val="EFEDEC"/>
                 </a:solidFill>
@@ -16698,7 +16617,7 @@
               </a:defRPr>
             </a:pPr>
             <a:r>
-              <a:t>“He who loves father or mother more than me is not worthy of me;</a:t>
+              <a:t>“Whoever loves father or mother more than me is not worthy of me, and whoever loves son or daughter more than me is not worthy of me;</a:t>
             </a:r>
           </a:p>
           <a:p>
@@ -16706,7 +16625,7 @@
               <a:lnSpc>
                 <a:spcPct val="108000"/>
               </a:lnSpc>
-              <a:defRPr sz="3800" b="0" i="0" u="none">
+              <a:defRPr sz="3000" b="0" i="0" u="none">
                 <a:solidFill>
                   <a:srgbClr val="EFEDEC"/>
                 </a:solidFill>
@@ -16714,7 +16633,7 @@
               </a:defRPr>
             </a:pPr>
             <a:r>
-              <a:t>and he who loves son or daughter more than me isn't worthy of me.”</a:t>
+              <a:t>and whoever does not take up his cross and follow after me is not worthy of me.”</a:t>
             </a:r>
           </a:p>
         </p:txBody>
@@ -16989,7 +16908,7 @@
           <a:noFill/>
         </p:spPr>
         <p:txBody>
-          <a:bodyPr wrap="square" lIns="109728" rIns="109728" tIns="73152" bIns="73152" anchor="ctr">
+          <a:bodyPr wrap="none" lIns="109728" rIns="109728" tIns="73152" bIns="73152" anchor="ctr">
             <a:noAutofit/>
           </a:bodyPr>
           <a:lstStyle/>
@@ -17076,7 +16995,7 @@
               <a:lnSpc>
                 <a:spcPct val="108000"/>
               </a:lnSpc>
-              <a:defRPr sz="3800" b="0" i="0" u="none">
+              <a:defRPr sz="3000" b="0" i="0" u="none">
                 <a:solidFill>
                   <a:srgbClr val="EFEDEC"/>
                 </a:solidFill>
@@ -17084,7 +17003,7 @@
               </a:defRPr>
             </a:pPr>
             <a:r>
-              <a:t>“He who loves father or mother more than me is not worthy of me;</a:t>
+              <a:t>“Whoever loves father or mother more than me is not worthy of me, and whoever loves son or daughter more than me is not worthy of me;</a:t>
             </a:r>
           </a:p>
           <a:p>
@@ -17092,7 +17011,7 @@
               <a:lnSpc>
                 <a:spcPct val="108000"/>
               </a:lnSpc>
-              <a:defRPr sz="3800" b="0" i="0" u="none">
+              <a:defRPr sz="3000" b="0" i="0" u="none">
                 <a:solidFill>
                   <a:srgbClr val="EFEDEC"/>
                 </a:solidFill>
@@ -17100,7 +17019,7 @@
               </a:defRPr>
             </a:pPr>
             <a:r>
-              <a:t>and he who loves son or daughter more than me isn't worthy of me.”</a:t>
+              <a:t>and whoever does not take up his cross and follow after me is not worthy of me.”</a:t>
             </a:r>
           </a:p>
         </p:txBody>
@@ -18230,8 +18149,8 @@
         </p:nvSpPr>
         <p:spPr>
           <a:xfrm>
-            <a:off x="0" y="823874"/>
-            <a:ext cx="18288000" cy="4797856"/>
+            <a:off x="0" y="1097280"/>
+            <a:ext cx="18288000" cy="4457700"/>
           </a:xfrm>
           <a:prstGeom prst="rect">
             <a:avLst/>
@@ -18250,7 +18169,7 @@
               </a:lnSpc>
             </a:pPr>
             <a:r>
-              <a:rPr sz="7500" b="1" i="0">
+              <a:rPr sz="7100" b="1" i="0">
                 <a:solidFill>
                   <a:srgbClr val="FFFFFF"/>
                 </a:solidFill>
@@ -18266,7 +18185,7 @@
               </a:lnSpc>
             </a:pPr>
             <a:r>
-              <a:rPr sz="7500" b="1" i="0">
+              <a:rPr sz="7100" b="1" i="0">
                 <a:solidFill>
                   <a:srgbClr val="FFFFFF"/>
                 </a:solidFill>
@@ -18282,7 +18201,7 @@
               </a:lnSpc>
             </a:pPr>
             <a:r>
-              <a:rPr sz="7500" b="1" i="0">
+              <a:rPr sz="7100" b="1" i="0">
                 <a:solidFill>
                   <a:srgbClr val="FFFFFF"/>
                 </a:solidFill>
@@ -18298,7 +18217,7 @@
               </a:lnSpc>
             </a:pPr>
             <a:r>
-              <a:rPr sz="7500" b="1" i="0">
+              <a:rPr sz="7100" b="1" i="0">
                 <a:solidFill>
                   <a:srgbClr val="FFFFFF"/>
                 </a:solidFill>
@@ -18317,8 +18236,8 @@
         </p:nvSpPr>
         <p:spPr>
           <a:xfrm>
-            <a:off x="0" y="5471769"/>
-            <a:ext cx="18288000" cy="4797856"/>
+            <a:off x="0" y="5829300"/>
+            <a:ext cx="18288000" cy="4457700"/>
           </a:xfrm>
           <a:prstGeom prst="rect">
             <a:avLst/>
@@ -18337,7 +18256,7 @@
               </a:lnSpc>
             </a:pPr>
             <a:r>
-              <a:rPr sz="6600" b="1" i="1">
+              <a:rPr sz="5600" b="1" i="1">
                 <a:solidFill>
                   <a:srgbClr val="FFFFFF"/>
                 </a:solidFill>
@@ -18353,7 +18272,7 @@
               </a:lnSpc>
             </a:pPr>
             <a:r>
-              <a:rPr sz="6600" b="1" i="1">
+              <a:rPr sz="5600" b="1" i="1">
                 <a:solidFill>
                   <a:srgbClr val="FFFFFF"/>
                 </a:solidFill>
@@ -18438,8 +18357,8 @@
         </p:nvSpPr>
         <p:spPr>
           <a:xfrm>
-            <a:off x="0" y="442569"/>
-            <a:ext cx="18288000" cy="4797856"/>
+            <a:off x="0" y="0"/>
+            <a:ext cx="18288000" cy="5006340"/>
           </a:xfrm>
           <a:prstGeom prst="rect">
             <a:avLst/>
@@ -18458,7 +18377,7 @@
               </a:lnSpc>
             </a:pPr>
             <a:r>
-              <a:rPr sz="7500" b="1" i="0">
+              <a:rPr sz="7200" b="1" i="0">
                 <a:solidFill>
                   <a:srgbClr val="FFFFFF"/>
                 </a:solidFill>
@@ -18474,7 +18393,7 @@
               </a:lnSpc>
             </a:pPr>
             <a:r>
-              <a:rPr sz="7500" b="1" i="0">
+              <a:rPr sz="7200" b="1" i="0">
                 <a:solidFill>
                   <a:srgbClr val="FFFFFF"/>
                 </a:solidFill>
@@ -18490,7 +18409,7 @@
               </a:lnSpc>
             </a:pPr>
             <a:r>
-              <a:rPr sz="7500" b="1" i="0">
+              <a:rPr sz="7200" b="1" i="0">
                 <a:solidFill>
                   <a:srgbClr val="FFFFFF"/>
                 </a:solidFill>
@@ -18506,7 +18425,7 @@
               </a:lnSpc>
             </a:pPr>
             <a:r>
-              <a:rPr sz="7500" b="1" i="0">
+              <a:rPr sz="7200" b="1" i="0">
                 <a:solidFill>
                   <a:srgbClr val="FFFFFF"/>
                 </a:solidFill>
@@ -18525,8 +18444,8 @@
         </p:nvSpPr>
         <p:spPr>
           <a:xfrm>
-            <a:off x="0" y="5091379"/>
-            <a:ext cx="18288000" cy="4797856"/>
+            <a:off x="0" y="5280660"/>
+            <a:ext cx="18288000" cy="5006340"/>
           </a:xfrm>
           <a:prstGeom prst="rect">
             <a:avLst/>
@@ -18545,7 +18464,7 @@
               </a:lnSpc>
             </a:pPr>
             <a:r>
-              <a:rPr sz="7500" b="1" i="1">
+              <a:rPr sz="7300" b="1" i="1">
                 <a:solidFill>
                   <a:srgbClr val="FFFFFF"/>
                 </a:solidFill>
@@ -18630,8 +18549,8 @@
         </p:nvSpPr>
         <p:spPr>
           <a:xfrm>
-            <a:off x="0" y="442569"/>
-            <a:ext cx="18288000" cy="4797856"/>
+            <a:off x="0" y="0"/>
+            <a:ext cx="18288000" cy="5006340"/>
           </a:xfrm>
           <a:prstGeom prst="rect">
             <a:avLst/>
@@ -18669,8 +18588,8 @@
         </p:nvSpPr>
         <p:spPr>
           <a:xfrm>
-            <a:off x="0" y="5091379"/>
-            <a:ext cx="18288000" cy="4797856"/>
+            <a:off x="0" y="5280660"/>
+            <a:ext cx="18288000" cy="5006340"/>
           </a:xfrm>
           <a:prstGeom prst="rect">
             <a:avLst/>
@@ -18689,7 +18608,7 @@
               </a:lnSpc>
             </a:pPr>
             <a:r>
-              <a:rPr sz="7400" b="1" i="1">
+              <a:rPr sz="6400" b="1" i="1">
                 <a:solidFill>
                   <a:srgbClr val="FFFFFF"/>
                 </a:solidFill>
@@ -18705,7 +18624,7 @@
               </a:lnSpc>
             </a:pPr>
             <a:r>
-              <a:rPr sz="7400" b="1" i="1">
+              <a:rPr sz="6400" b="1" i="1">
                 <a:solidFill>
                   <a:srgbClr val="FFFFFF"/>
                 </a:solidFill>
@@ -18721,7 +18640,7 @@
               </a:lnSpc>
             </a:pPr>
             <a:r>
-              <a:rPr sz="7400" b="1" i="1">
+              <a:rPr sz="6400" b="1" i="1">
                 <a:solidFill>
                   <a:srgbClr val="FFFFFF"/>
                 </a:solidFill>
@@ -18737,7 +18656,7 @@
               </a:lnSpc>
             </a:pPr>
             <a:r>
-              <a:rPr sz="7400" b="1" i="1">
+              <a:rPr sz="6400" b="1" i="1">
                 <a:solidFill>
                   <a:srgbClr val="FFFFFF"/>
                 </a:solidFill>
@@ -18822,8 +18741,8 @@
         </p:nvSpPr>
         <p:spPr>
           <a:xfrm>
-            <a:off x="0" y="442569"/>
-            <a:ext cx="18288000" cy="4797856"/>
+            <a:off x="0" y="0"/>
+            <a:ext cx="18288000" cy="5006340"/>
           </a:xfrm>
           <a:prstGeom prst="rect">
             <a:avLst/>
@@ -18842,7 +18761,7 @@
               </a:lnSpc>
             </a:pPr>
             <a:r>
-              <a:rPr sz="7500" b="1" i="0">
+              <a:rPr sz="7300" b="1" i="0">
                 <a:solidFill>
                   <a:srgbClr val="FFFFFF"/>
                 </a:solidFill>
@@ -18861,8 +18780,8 @@
         </p:nvSpPr>
         <p:spPr>
           <a:xfrm>
-            <a:off x="0" y="5091379"/>
-            <a:ext cx="18288000" cy="4797856"/>
+            <a:off x="0" y="5280660"/>
+            <a:ext cx="18288000" cy="5006340"/>
           </a:xfrm>
           <a:prstGeom prst="rect">
             <a:avLst/>
@@ -19124,7 +19043,7 @@
           <a:noFill/>
         </p:spPr>
         <p:txBody>
-          <a:bodyPr wrap="square" lIns="109728" rIns="109728" tIns="73152" bIns="73152" anchor="ctr">
+          <a:bodyPr wrap="none" lIns="109728" rIns="109728" tIns="73152" bIns="73152" anchor="ctr">
             <a:noAutofit/>
           </a:bodyPr>
           <a:lstStyle/>
@@ -19211,7 +19130,7 @@
               <a:lnSpc>
                 <a:spcPct val="108000"/>
               </a:lnSpc>
-              <a:defRPr sz="3800" b="0" i="0" u="none">
+              <a:defRPr sz="3000" b="0" i="0" u="none">
                 <a:solidFill>
                   <a:srgbClr val="EFEDEC"/>
                 </a:solidFill>
@@ -19219,7 +19138,7 @@
               </a:defRPr>
             </a:pPr>
             <a:r>
-              <a:t>“He who loves father or mother more than me is not worthy of me;</a:t>
+              <a:t>“Whoever loves father or mother more than me is not worthy of me, and whoever loves son or daughter more than me is not worthy of me;</a:t>
             </a:r>
           </a:p>
           <a:p>
@@ -19227,7 +19146,7 @@
               <a:lnSpc>
                 <a:spcPct val="108000"/>
               </a:lnSpc>
-              <a:defRPr sz="3800" b="0" i="0" u="none">
+              <a:defRPr sz="3000" b="0" i="0" u="none">
                 <a:solidFill>
                   <a:srgbClr val="EFEDEC"/>
                 </a:solidFill>
@@ -19235,7 +19154,7 @@
               </a:defRPr>
             </a:pPr>
             <a:r>
-              <a:t>and he who loves son or daughter more than me isn't worthy of me.”</a:t>
+              <a:t>and whoever does not take up his cross and follow after me is not worthy of me.”</a:t>
             </a:r>
           </a:p>
         </p:txBody>
